--- a/outputs/ophthalmology-batch-20261011/endothelium/algorithm_editable.pptx
+++ b/outputs/ophthalmology-batch-20261011/endothelium/algorithm_editable.pptx
@@ -662,7 +662,7 @@
           <a:p/>
           <a:p>
             <a:r>
-              <a:t>endothelium-12 气体固定：过滤空气或10%~14% C3F8固定；气少/吸收快增脱离，过多致瞳孔阻滞。复杂DSEK可黏弹剂，DMEK不能黏弹剂固定。</a:t>
+              <a:t>endothelium-12 气体固定：过滤空气或10%~14% C₃F₈固定；气少/吸收快增脱离，过多致瞳孔阻滞。复杂DSEK可黏弹剂，DMEK不能使用黏弹剂固定植片。</a:t>
             </a:r>
           </a:p>
           <a:p>
@@ -710,7 +710,7 @@
           <a:p/>
           <a:p>
             <a:r>
-              <a:t>endothelium-16 阻滞性青光眼：推荐6:00周边虹膜切除防阻滞；术后早期2~6 h密切看眼压，必要时释过量前房气体，避免不可逆损伤。具体眼压数值切点未明确。</a:t>
+              <a:t>endothelium-16 阻滞性青光眼：推荐6点钟方位周边虹膜切除防阻滞；术后早期2~6 h密切看眼压，必要时释过量前房气体，避免不可逆损伤。具体眼压数值切点未明确。</a:t>
             </a:r>
           </a:p>
           <a:p>
@@ -742,7 +742,7 @@
           <a:p/>
           <a:p>
             <a:r>
-              <a:t>endothelium-18 术后检查：第1天气体填大部前房但坐位避开6:00虹膜切除口；可疑脱离及时前节OCT；透明后尽早内皮计数并定期复查。</a:t>
+              <a:t>endothelium-18 术后检查：第1天气体填大部前房但坐位避开6点钟方位虹膜切除口；可疑脱离及时前节OCT；透明后尽早内皮计数并定期复查。</a:t>
             </a:r>
           </a:p>
           <a:p>
@@ -4773,7 +4773,7 @@
       </p:sp>
       <p:sp>
         <p:nvSpPr>
-          <p:cNvPr id="22" name="内皮≥2 500、直径7.75~8.00 mm；辨方向、非接触、周边虹膜切除及合适气体量。"/>
+          <p:cNvPr id="22" name="内皮密度≥2 500个/mm²、直径7.75~8.00 mm；辨方向、非接触、周边虹膜切除及合适气体"/>
           <p:cNvSpPr txBox="1"/>
           <p:nvPr/>
         </p:nvSpPr>
@@ -4813,7 +4813,7 @@
                 <a:ea typeface="Microsoft YaHei"/>
                 <a:cs typeface="Microsoft YaHei"/>
               </a:rPr>
-              <a:t>内皮≥2 500、直径7.75~8.00 mm；辨方向、非接触、</a:t>
+              <a:t>内皮密度≥2 500个/mm²、直径7.75~8.00 mm；辨方</a:t>
             </a:r>
           </a:p>
           <a:p>
@@ -4837,7 +4837,7 @@
                 <a:ea typeface="Microsoft YaHei"/>
                 <a:cs typeface="Microsoft YaHei"/>
               </a:rPr>
-              <a:t>周边虹膜切除及合适气体量。</a:t>
+              <a:t>向、非接触、周边虹膜切除及合适气体量。</a:t>
             </a:r>
           </a:p>
         </p:txBody>
@@ -5019,7 +5019,7 @@
       </p:sp>
       <p:sp>
         <p:nvSpPr>
-          <p:cNvPr id="27" name="2~6 h密切眼压，阻滞必要释气；OCT见大范围脱离：DSEK&gt;1/3、DMEK&gt;1/4 → 再注气"/>
+          <p:cNvPr id="27" name="2~6 h密切眼压，阻滞必要释气；OCT见大范围脱离：DSEK脱离&gt;1/3、DMEK脱离&gt;1/4 →"/>
           <p:cNvSpPr txBox="1"/>
           <p:nvPr/>
         </p:nvSpPr>
@@ -5083,7 +5083,7 @@
                 <a:ea typeface="Microsoft YaHei"/>
                 <a:cs typeface="Microsoft YaHei"/>
               </a:rPr>
-              <a:t>DSEK&gt;1/3、DMEK&gt;1/4 → 再注气。</a:t>
+              <a:t>DSEK脱离&gt;1/3、DMEK脱离&gt;1/4 → 再注气。</a:t>
             </a:r>
           </a:p>
         </p:txBody>
